--- a/스크립트언어/2021182014 박신우 숙제2.pptx
+++ b/스크립트언어/2021182014 박신우 숙제2.pptx
@@ -5,7 +5,7 @@
     <p:sldMasterId id="2147483684" r:id="rId1"/>
   </p:sldMasterIdLst>
   <p:notesMasterIdLst>
-    <p:notesMasterId r:id="rId13"/>
+    <p:notesMasterId r:id="rId18"/>
   </p:notesMasterIdLst>
   <p:sldIdLst>
     <p:sldId id="258" r:id="rId2"/>
@@ -17,8 +17,13 @@
     <p:sldId id="337" r:id="rId8"/>
     <p:sldId id="343" r:id="rId9"/>
     <p:sldId id="339" r:id="rId10"/>
-    <p:sldId id="340" r:id="rId11"/>
-    <p:sldId id="341" r:id="rId12"/>
+    <p:sldId id="345" r:id="rId11"/>
+    <p:sldId id="346" r:id="rId12"/>
+    <p:sldId id="340" r:id="rId13"/>
+    <p:sldId id="348" r:id="rId14"/>
+    <p:sldId id="347" r:id="rId15"/>
+    <p:sldId id="341" r:id="rId16"/>
+    <p:sldId id="344" r:id="rId17"/>
   </p:sldIdLst>
   <p:sldSz cx="9144000" cy="6858000" type="screen4x3"/>
   <p:notesSz cx="6796088" cy="9926638"/>
@@ -278,7 +283,7 @@
               <a:pPr>
                 <a:defRPr/>
               </a:pPr>
-              <a:t>2026-03-16</a:t>
+              <a:t>2026-03-23</a:t>
             </a:fld>
             <a:endParaRPr lang="ko-KR" altLang="en-US"/>
           </a:p>
@@ -2193,7 +2198,7 @@
               <a:pPr>
                 <a:defRPr/>
               </a:pPr>
-              <a:t>10</a:t>
+              <a:t>12</a:t>
             </a:fld>
             <a:endParaRPr lang="ko-KR" altLang="en-US"/>
           </a:p>
@@ -2307,7 +2312,7 @@
               <a:pPr>
                 <a:defRPr/>
               </a:pPr>
-              <a:t>11</a:t>
+              <a:t>15</a:t>
             </a:fld>
             <a:endParaRPr lang="ko-KR" altLang="en-US"/>
           </a:p>
@@ -6873,6 +6878,564 @@
   <p:cSld>
     <p:spTree>
       <p:nvGrpSpPr>
+        <p:cNvPr id="1" name=""/>
+        <p:cNvGrpSpPr/>
+        <p:nvPr/>
+      </p:nvGrpSpPr>
+      <p:grpSpPr>
+        <a:xfrm>
+          <a:off x="0" y="0"/>
+          <a:ext cx="0" cy="0"/>
+          <a:chOff x="0" y="0"/>
+          <a:chExt cx="0" cy="0"/>
+        </a:xfrm>
+      </p:grpSpPr>
+      <p:sp>
+        <p:nvSpPr>
+          <p:cNvPr id="2" name="제목 1">
+            <a:extLst>
+              <a:ext uri="{FF2B5EF4-FFF2-40B4-BE49-F238E27FC236}">
+                <a16:creationId xmlns:a16="http://schemas.microsoft.com/office/drawing/2014/main" id="{65D240E0-4D0F-1125-8FD3-19AB304A8C7A}"/>
+              </a:ext>
+            </a:extLst>
+          </p:cNvPr>
+          <p:cNvSpPr>
+            <a:spLocks noGrp="1"/>
+          </p:cNvSpPr>
+          <p:nvPr>
+            <p:ph type="title"/>
+          </p:nvPr>
+        </p:nvSpPr>
+        <p:spPr>
+          <a:xfrm>
+            <a:off x="457200" y="274638"/>
+            <a:ext cx="8229600" cy="418058"/>
+          </a:xfrm>
+        </p:spPr>
+        <p:txBody>
+          <a:bodyPr/>
+          <a:lstStyle/>
+          <a:p>
+            <a:r>
+              <a:rPr lang="en-US" altLang="ko-KR" dirty="0"/>
+              <a:t>3. </a:t>
+            </a:r>
+            <a:r>
+              <a:rPr lang="ko-KR" altLang="en-US" dirty="0" err="1"/>
+              <a:t>자산증감</a:t>
+            </a:r>
+            <a:r>
+              <a:rPr lang="ko-KR" altLang="en-US" dirty="0"/>
+              <a:t> </a:t>
+            </a:r>
+            <a:r>
+              <a:rPr lang="en-US" altLang="ko-KR" dirty="0"/>
+              <a:t>(</a:t>
+            </a:r>
+            <a:r>
+              <a:rPr lang="en-US" altLang="ko-KR" dirty="0" err="1"/>
+              <a:t>TUKorea</a:t>
+            </a:r>
+            <a:r>
+              <a:rPr lang="en-US" altLang="ko-KR" dirty="0"/>
+              <a:t>, </a:t>
+            </a:r>
+            <a:r>
+              <a:rPr lang="ko-KR" altLang="en-US" dirty="0"/>
+              <a:t>구현</a:t>
+            </a:r>
+            <a:r>
+              <a:rPr lang="en-US" altLang="ko-KR" dirty="0"/>
+              <a:t>)</a:t>
+            </a:r>
+            <a:endParaRPr lang="ko-KR" altLang="en-US" dirty="0"/>
+          </a:p>
+        </p:txBody>
+      </p:sp>
+      <p:pic>
+        <p:nvPicPr>
+          <p:cNvPr id="7" name="내용 개체 틀 6">
+            <a:extLst>
+              <a:ext uri="{FF2B5EF4-FFF2-40B4-BE49-F238E27FC236}">
+                <a16:creationId xmlns:a16="http://schemas.microsoft.com/office/drawing/2014/main" id="{FA18E542-1883-B8FB-A024-C33D01305BC5}"/>
+              </a:ext>
+            </a:extLst>
+          </p:cNvPr>
+          <p:cNvPicPr>
+            <a:picLocks noGrp="1" noChangeAspect="1"/>
+          </p:cNvPicPr>
+          <p:nvPr>
+            <p:ph idx="1"/>
+          </p:nvPr>
+        </p:nvPicPr>
+        <p:blipFill>
+          <a:blip r:embed="rId2"/>
+          <a:stretch>
+            <a:fillRect/>
+          </a:stretch>
+        </p:blipFill>
+        <p:spPr bwMode="auto">
+          <a:xfrm>
+            <a:off x="323528" y="1104379"/>
+            <a:ext cx="2356922" cy="4840288"/>
+          </a:xfrm>
+          <a:prstGeom prst="rect">
+            <a:avLst/>
+          </a:prstGeom>
+          <a:noFill/>
+          <a:ln>
+            <a:noFill/>
+          </a:ln>
+          <a:extLst>
+            <a:ext uri="{909E8E84-426E-40DD-AFC4-6F175D3DCCD1}">
+              <a14:hiddenFill xmlns:a14="http://schemas.microsoft.com/office/drawing/2010/main">
+                <a:solidFill>
+                  <a:srgbClr val="FFFFFF"/>
+                </a:solidFill>
+              </a14:hiddenFill>
+            </a:ext>
+            <a:ext uri="{91240B29-F687-4F45-9708-019B960494DF}">
+              <a14:hiddenLine xmlns:a14="http://schemas.microsoft.com/office/drawing/2010/main" w="9525">
+                <a:solidFill>
+                  <a:srgbClr val="000000"/>
+                </a:solidFill>
+                <a:miter lim="800000"/>
+                <a:headEnd/>
+                <a:tailEnd/>
+              </a14:hiddenLine>
+            </a:ext>
+          </a:extLst>
+        </p:spPr>
+      </p:pic>
+      <p:sp>
+        <p:nvSpPr>
+          <p:cNvPr id="4" name="날짜 개체 틀 3">
+            <a:extLst>
+              <a:ext uri="{FF2B5EF4-FFF2-40B4-BE49-F238E27FC236}">
+                <a16:creationId xmlns:a16="http://schemas.microsoft.com/office/drawing/2014/main" id="{FA12592D-01E1-92F8-C7A3-1FBB7073A4E8}"/>
+              </a:ext>
+            </a:extLst>
+          </p:cNvPr>
+          <p:cNvSpPr>
+            <a:spLocks noGrp="1"/>
+          </p:cNvSpPr>
+          <p:nvPr>
+            <p:ph type="dt" sz="half" idx="10"/>
+          </p:nvPr>
+        </p:nvSpPr>
+        <p:spPr/>
+        <p:txBody>
+          <a:bodyPr/>
+          <a:lstStyle/>
+          <a:p>
+            <a:pPr>
+              <a:defRPr/>
+            </a:pPr>
+            <a:r>
+              <a:rPr lang="en-US" altLang="ko-KR"/>
+              <a:t>2008</a:t>
+            </a:r>
+            <a:r>
+              <a:rPr lang="ko-KR" altLang="en-US"/>
+              <a:t>년</a:t>
+            </a:r>
+            <a:r>
+              <a:rPr lang="en-US" altLang="ko-KR"/>
+              <a:t>2</a:t>
+            </a:r>
+            <a:r>
+              <a:rPr lang="ko-KR" altLang="en-US"/>
+              <a:t>학기 </a:t>
+            </a:r>
+            <a:r>
+              <a:rPr lang="en-US" altLang="ko-KR"/>
+              <a:t>3D</a:t>
+            </a:r>
+            <a:r>
+              <a:rPr lang="ko-KR" altLang="en-US"/>
+              <a:t>게임프로그래밍</a:t>
+            </a:r>
+            <a:r>
+              <a:rPr lang="en-US" altLang="ko-KR"/>
+              <a:t>II </a:t>
+            </a:r>
+            <a:r>
+              <a:rPr lang="ko-KR" altLang="en-US"/>
+              <a:t>담당교수</a:t>
+            </a:r>
+            <a:r>
+              <a:rPr lang="en-US" altLang="ko-KR"/>
+              <a:t>:</a:t>
+            </a:r>
+            <a:r>
+              <a:rPr lang="ko-KR" altLang="en-US"/>
+              <a:t>김영식</a:t>
+            </a:r>
+          </a:p>
+        </p:txBody>
+      </p:sp>
+      <p:sp>
+        <p:nvSpPr>
+          <p:cNvPr id="5" name="슬라이드 번호 개체 틀 4">
+            <a:extLst>
+              <a:ext uri="{FF2B5EF4-FFF2-40B4-BE49-F238E27FC236}">
+                <a16:creationId xmlns:a16="http://schemas.microsoft.com/office/drawing/2014/main" id="{9CB8DC79-2A5D-D623-9253-F7C1BFB72AB1}"/>
+              </a:ext>
+            </a:extLst>
+          </p:cNvPr>
+          <p:cNvSpPr>
+            <a:spLocks noGrp="1"/>
+          </p:cNvSpPr>
+          <p:nvPr>
+            <p:ph type="sldNum" sz="quarter" idx="12"/>
+          </p:nvPr>
+        </p:nvSpPr>
+        <p:spPr/>
+        <p:txBody>
+          <a:bodyPr/>
+          <a:lstStyle/>
+          <a:p>
+            <a:pPr>
+              <a:defRPr/>
+            </a:pPr>
+            <a:fld id="{A268DA64-E15D-4814-A1DA-86D92D550423}" type="slidenum">
+              <a:rPr lang="ko-KR" altLang="en-US" smtClean="0"/>
+              <a:pPr>
+                <a:defRPr/>
+              </a:pPr>
+              <a:t>10</a:t>
+            </a:fld>
+            <a:endParaRPr lang="ko-KR" altLang="en-US"/>
+          </a:p>
+        </p:txBody>
+      </p:sp>
+      <p:pic>
+        <p:nvPicPr>
+          <p:cNvPr id="9" name="그림 8">
+            <a:extLst>
+              <a:ext uri="{FF2B5EF4-FFF2-40B4-BE49-F238E27FC236}">
+                <a16:creationId xmlns:a16="http://schemas.microsoft.com/office/drawing/2014/main" id="{F52275C4-16A3-B0C9-671E-7E44F55BD425}"/>
+              </a:ext>
+            </a:extLst>
+          </p:cNvPr>
+          <p:cNvPicPr>
+            <a:picLocks noChangeAspect="1"/>
+          </p:cNvPicPr>
+          <p:nvPr/>
+        </p:nvPicPr>
+        <p:blipFill>
+          <a:blip r:embed="rId3"/>
+          <a:stretch>
+            <a:fillRect/>
+          </a:stretch>
+        </p:blipFill>
+        <p:spPr>
+          <a:xfrm>
+            <a:off x="2627784" y="1246448"/>
+            <a:ext cx="3010241" cy="4365104"/>
+          </a:xfrm>
+          <a:prstGeom prst="rect">
+            <a:avLst/>
+          </a:prstGeom>
+        </p:spPr>
+      </p:pic>
+      <p:pic>
+        <p:nvPicPr>
+          <p:cNvPr id="11" name="그림 10">
+            <a:extLst>
+              <a:ext uri="{FF2B5EF4-FFF2-40B4-BE49-F238E27FC236}">
+                <a16:creationId xmlns:a16="http://schemas.microsoft.com/office/drawing/2014/main" id="{C4668333-A0C6-8F1A-2610-E7B6E90ECD2B}"/>
+              </a:ext>
+            </a:extLst>
+          </p:cNvPr>
+          <p:cNvPicPr>
+            <a:picLocks noChangeAspect="1"/>
+          </p:cNvPicPr>
+          <p:nvPr/>
+        </p:nvPicPr>
+        <p:blipFill>
+          <a:blip r:embed="rId4"/>
+          <a:stretch>
+            <a:fillRect/>
+          </a:stretch>
+        </p:blipFill>
+        <p:spPr>
+          <a:xfrm>
+            <a:off x="5708469" y="1096187"/>
+            <a:ext cx="2978331" cy="4665625"/>
+          </a:xfrm>
+          <a:prstGeom prst="rect">
+            <a:avLst/>
+          </a:prstGeom>
+        </p:spPr>
+      </p:pic>
+    </p:spTree>
+    <p:extLst>
+      <p:ext uri="{BB962C8B-B14F-4D97-AF65-F5344CB8AC3E}">
+        <p14:creationId xmlns:p14="http://schemas.microsoft.com/office/powerpoint/2010/main" val="802555936"/>
+      </p:ext>
+    </p:extLst>
+  </p:cSld>
+  <p:clrMapOvr>
+    <a:masterClrMapping/>
+  </p:clrMapOvr>
+</p:sld>
+</file>
+
+<file path=ppt/slides/slide11.xml><?xml version="1.0" encoding="utf-8"?>
+<p:sld xmlns:a="http://schemas.openxmlformats.org/drawingml/2006/main" xmlns:r="http://schemas.openxmlformats.org/officeDocument/2006/relationships" xmlns:p="http://schemas.openxmlformats.org/presentationml/2006/main">
+  <p:cSld>
+    <p:spTree>
+      <p:nvGrpSpPr>
+        <p:cNvPr id="1" name=""/>
+        <p:cNvGrpSpPr/>
+        <p:nvPr/>
+      </p:nvGrpSpPr>
+      <p:grpSpPr>
+        <a:xfrm>
+          <a:off x="0" y="0"/>
+          <a:ext cx="0" cy="0"/>
+          <a:chOff x="0" y="0"/>
+          <a:chExt cx="0" cy="0"/>
+        </a:xfrm>
+      </p:grpSpPr>
+      <p:sp>
+        <p:nvSpPr>
+          <p:cNvPr id="2" name="제목 1">
+            <a:extLst>
+              <a:ext uri="{FF2B5EF4-FFF2-40B4-BE49-F238E27FC236}">
+                <a16:creationId xmlns:a16="http://schemas.microsoft.com/office/drawing/2014/main" id="{8E8E5496-B77B-3483-7EA7-A0CF5F626FC4}"/>
+              </a:ext>
+            </a:extLst>
+          </p:cNvPr>
+          <p:cNvSpPr>
+            <a:spLocks noGrp="1"/>
+          </p:cNvSpPr>
+          <p:nvPr>
+            <p:ph type="title"/>
+          </p:nvPr>
+        </p:nvSpPr>
+        <p:spPr>
+          <a:xfrm>
+            <a:off x="457200" y="274638"/>
+            <a:ext cx="8229600" cy="562074"/>
+          </a:xfrm>
+        </p:spPr>
+        <p:txBody>
+          <a:bodyPr/>
+          <a:lstStyle/>
+          <a:p>
+            <a:r>
+              <a:rPr lang="en-US" altLang="ko-KR" dirty="0"/>
+              <a:t>3. </a:t>
+            </a:r>
+            <a:r>
+              <a:rPr lang="ko-KR" altLang="en-US" dirty="0" err="1"/>
+              <a:t>자산증감</a:t>
+            </a:r>
+            <a:r>
+              <a:rPr lang="ko-KR" altLang="en-US" dirty="0"/>
+              <a:t> </a:t>
+            </a:r>
+            <a:r>
+              <a:rPr lang="en-US" altLang="ko-KR" dirty="0"/>
+              <a:t>(</a:t>
+            </a:r>
+            <a:r>
+              <a:rPr lang="en-US" altLang="ko-KR" dirty="0" err="1"/>
+              <a:t>TUKorea</a:t>
+            </a:r>
+            <a:r>
+              <a:rPr lang="en-US" altLang="ko-KR" dirty="0"/>
+              <a:t>, </a:t>
+            </a:r>
+            <a:r>
+              <a:rPr lang="ko-KR" altLang="en-US" dirty="0"/>
+              <a:t>구현</a:t>
+            </a:r>
+            <a:r>
+              <a:rPr lang="en-US" altLang="ko-KR" dirty="0"/>
+              <a:t>)</a:t>
+            </a:r>
+            <a:endParaRPr lang="ko-KR" altLang="en-US" dirty="0"/>
+          </a:p>
+        </p:txBody>
+      </p:sp>
+      <p:pic>
+        <p:nvPicPr>
+          <p:cNvPr id="7" name="내용 개체 틀 6">
+            <a:extLst>
+              <a:ext uri="{FF2B5EF4-FFF2-40B4-BE49-F238E27FC236}">
+                <a16:creationId xmlns:a16="http://schemas.microsoft.com/office/drawing/2014/main" id="{9E91B1CA-7A74-6432-D9DE-A834ED147EF1}"/>
+              </a:ext>
+            </a:extLst>
+          </p:cNvPr>
+          <p:cNvPicPr>
+            <a:picLocks noGrp="1" noChangeAspect="1"/>
+          </p:cNvPicPr>
+          <p:nvPr>
+            <p:ph idx="1"/>
+          </p:nvPr>
+        </p:nvPicPr>
+        <p:blipFill>
+          <a:blip r:embed="rId2"/>
+          <a:stretch>
+            <a:fillRect/>
+          </a:stretch>
+        </p:blipFill>
+        <p:spPr bwMode="auto">
+          <a:xfrm>
+            <a:off x="611560" y="2204864"/>
+            <a:ext cx="8229600" cy="1593217"/>
+          </a:xfrm>
+          <a:prstGeom prst="rect">
+            <a:avLst/>
+          </a:prstGeom>
+          <a:noFill/>
+          <a:ln>
+            <a:noFill/>
+          </a:ln>
+          <a:extLst>
+            <a:ext uri="{909E8E84-426E-40DD-AFC4-6F175D3DCCD1}">
+              <a14:hiddenFill xmlns:a14="http://schemas.microsoft.com/office/drawing/2010/main">
+                <a:solidFill>
+                  <a:srgbClr val="FFFFFF"/>
+                </a:solidFill>
+              </a14:hiddenFill>
+            </a:ext>
+            <a:ext uri="{91240B29-F687-4F45-9708-019B960494DF}">
+              <a14:hiddenLine xmlns:a14="http://schemas.microsoft.com/office/drawing/2010/main" w="9525">
+                <a:solidFill>
+                  <a:srgbClr val="000000"/>
+                </a:solidFill>
+                <a:miter lim="800000"/>
+                <a:headEnd/>
+                <a:tailEnd/>
+              </a14:hiddenLine>
+            </a:ext>
+          </a:extLst>
+        </p:spPr>
+      </p:pic>
+      <p:sp>
+        <p:nvSpPr>
+          <p:cNvPr id="4" name="날짜 개체 틀 3">
+            <a:extLst>
+              <a:ext uri="{FF2B5EF4-FFF2-40B4-BE49-F238E27FC236}">
+                <a16:creationId xmlns:a16="http://schemas.microsoft.com/office/drawing/2014/main" id="{2870A4BA-3B3D-FCC6-76A3-9F65844F0595}"/>
+              </a:ext>
+            </a:extLst>
+          </p:cNvPr>
+          <p:cNvSpPr>
+            <a:spLocks noGrp="1"/>
+          </p:cNvSpPr>
+          <p:nvPr>
+            <p:ph type="dt" sz="half" idx="10"/>
+          </p:nvPr>
+        </p:nvSpPr>
+        <p:spPr/>
+        <p:txBody>
+          <a:bodyPr/>
+          <a:lstStyle/>
+          <a:p>
+            <a:pPr>
+              <a:defRPr/>
+            </a:pPr>
+            <a:r>
+              <a:rPr lang="en-US" altLang="ko-KR"/>
+              <a:t>2008</a:t>
+            </a:r>
+            <a:r>
+              <a:rPr lang="ko-KR" altLang="en-US"/>
+              <a:t>년</a:t>
+            </a:r>
+            <a:r>
+              <a:rPr lang="en-US" altLang="ko-KR"/>
+              <a:t>2</a:t>
+            </a:r>
+            <a:r>
+              <a:rPr lang="ko-KR" altLang="en-US"/>
+              <a:t>학기 </a:t>
+            </a:r>
+            <a:r>
+              <a:rPr lang="en-US" altLang="ko-KR"/>
+              <a:t>3D</a:t>
+            </a:r>
+            <a:r>
+              <a:rPr lang="ko-KR" altLang="en-US"/>
+              <a:t>게임프로그래밍</a:t>
+            </a:r>
+            <a:r>
+              <a:rPr lang="en-US" altLang="ko-KR"/>
+              <a:t>II </a:t>
+            </a:r>
+            <a:r>
+              <a:rPr lang="ko-KR" altLang="en-US"/>
+              <a:t>담당교수</a:t>
+            </a:r>
+            <a:r>
+              <a:rPr lang="en-US" altLang="ko-KR"/>
+              <a:t>:</a:t>
+            </a:r>
+            <a:r>
+              <a:rPr lang="ko-KR" altLang="en-US"/>
+              <a:t>김영식</a:t>
+            </a:r>
+          </a:p>
+        </p:txBody>
+      </p:sp>
+      <p:sp>
+        <p:nvSpPr>
+          <p:cNvPr id="5" name="슬라이드 번호 개체 틀 4">
+            <a:extLst>
+              <a:ext uri="{FF2B5EF4-FFF2-40B4-BE49-F238E27FC236}">
+                <a16:creationId xmlns:a16="http://schemas.microsoft.com/office/drawing/2014/main" id="{2945E1E0-0BB8-B435-B7E0-63A0C6BE9E74}"/>
+              </a:ext>
+            </a:extLst>
+          </p:cNvPr>
+          <p:cNvSpPr>
+            <a:spLocks noGrp="1"/>
+          </p:cNvSpPr>
+          <p:nvPr>
+            <p:ph type="sldNum" sz="quarter" idx="12"/>
+          </p:nvPr>
+        </p:nvSpPr>
+        <p:spPr/>
+        <p:txBody>
+          <a:bodyPr/>
+          <a:lstStyle/>
+          <a:p>
+            <a:pPr>
+              <a:defRPr/>
+            </a:pPr>
+            <a:fld id="{A268DA64-E15D-4814-A1DA-86D92D550423}" type="slidenum">
+              <a:rPr lang="ko-KR" altLang="en-US" smtClean="0"/>
+              <a:pPr>
+                <a:defRPr/>
+              </a:pPr>
+              <a:t>11</a:t>
+            </a:fld>
+            <a:endParaRPr lang="ko-KR" altLang="en-US"/>
+          </a:p>
+        </p:txBody>
+      </p:sp>
+    </p:spTree>
+    <p:extLst>
+      <p:ext uri="{BB962C8B-B14F-4D97-AF65-F5344CB8AC3E}">
+        <p14:creationId xmlns:p14="http://schemas.microsoft.com/office/powerpoint/2010/main" val="3582963933"/>
+      </p:ext>
+    </p:extLst>
+  </p:cSld>
+  <p:clrMapOvr>
+    <a:masterClrMapping/>
+  </p:clrMapOvr>
+</p:sld>
+</file>
+
+<file path=ppt/slides/slide12.xml><?xml version="1.0" encoding="utf-8"?>
+<p:sld xmlns:a="http://schemas.openxmlformats.org/drawingml/2006/main" xmlns:r="http://schemas.openxmlformats.org/officeDocument/2006/relationships" xmlns:p="http://schemas.openxmlformats.org/presentationml/2006/main">
+  <p:cSld>
+    <p:spTree>
+      <p:nvGrpSpPr>
         <p:cNvPr id="1" name="">
           <a:extLst>
             <a:ext uri="{FF2B5EF4-FFF2-40B4-BE49-F238E27FC236}">
@@ -7169,7 +7732,7 @@
               <a:pPr>
                 <a:defRPr/>
               </a:pPr>
-              <a:t>10</a:t>
+              <a:t>12</a:t>
             </a:fld>
             <a:endParaRPr lang="ko-KR" altLang="en-US"/>
           </a:p>
@@ -7218,7 +7781,522 @@
 </p:sld>
 </file>
 
-<file path=ppt/slides/slide11.xml><?xml version="1.0" encoding="utf-8"?>
+<file path=ppt/slides/slide13.xml><?xml version="1.0" encoding="utf-8"?>
+<p:sld xmlns:a="http://schemas.openxmlformats.org/drawingml/2006/main" xmlns:r="http://schemas.openxmlformats.org/officeDocument/2006/relationships" xmlns:p="http://schemas.openxmlformats.org/presentationml/2006/main">
+  <p:cSld>
+    <p:spTree>
+      <p:nvGrpSpPr>
+        <p:cNvPr id="1" name=""/>
+        <p:cNvGrpSpPr/>
+        <p:nvPr/>
+      </p:nvGrpSpPr>
+      <p:grpSpPr>
+        <a:xfrm>
+          <a:off x="0" y="0"/>
+          <a:ext cx="0" cy="0"/>
+          <a:chOff x="0" y="0"/>
+          <a:chExt cx="0" cy="0"/>
+        </a:xfrm>
+      </p:grpSpPr>
+      <p:sp>
+        <p:nvSpPr>
+          <p:cNvPr id="2" name="제목 1">
+            <a:extLst>
+              <a:ext uri="{FF2B5EF4-FFF2-40B4-BE49-F238E27FC236}">
+                <a16:creationId xmlns:a16="http://schemas.microsoft.com/office/drawing/2014/main" id="{22658C62-66F2-EE5B-4A81-51A8F3E58B65}"/>
+              </a:ext>
+            </a:extLst>
+          </p:cNvPr>
+          <p:cNvSpPr>
+            <a:spLocks noGrp="1"/>
+          </p:cNvSpPr>
+          <p:nvPr>
+            <p:ph type="title"/>
+          </p:nvPr>
+        </p:nvSpPr>
+        <p:spPr>
+          <a:xfrm>
+            <a:off x="457200" y="274638"/>
+            <a:ext cx="8229600" cy="457199"/>
+          </a:xfrm>
+        </p:spPr>
+        <p:txBody>
+          <a:bodyPr/>
+          <a:lstStyle/>
+          <a:p>
+            <a:r>
+              <a:rPr lang="en-US" altLang="ko-KR" dirty="0"/>
+              <a:t>4. </a:t>
+            </a:r>
+            <a:r>
+              <a:rPr lang="ko-KR" altLang="en-US" dirty="0"/>
+              <a:t>균형 잡힌 영양소 </a:t>
+            </a:r>
+            <a:r>
+              <a:rPr lang="en-US" altLang="ko-KR" dirty="0"/>
+              <a:t>(</a:t>
+            </a:r>
+            <a:r>
+              <a:rPr lang="en-US" altLang="ko-KR" dirty="0" err="1"/>
+              <a:t>TUKorea</a:t>
+            </a:r>
+            <a:r>
+              <a:rPr lang="en-US" altLang="ko-KR" dirty="0"/>
+              <a:t>, </a:t>
+            </a:r>
+            <a:r>
+              <a:rPr lang="ko-KR" altLang="en-US" dirty="0"/>
+              <a:t>조합</a:t>
+            </a:r>
+            <a:r>
+              <a:rPr lang="en-US" altLang="ko-KR" dirty="0"/>
+              <a:t>)</a:t>
+            </a:r>
+            <a:endParaRPr lang="ko-KR" altLang="en-US" dirty="0"/>
+          </a:p>
+        </p:txBody>
+      </p:sp>
+      <p:pic>
+        <p:nvPicPr>
+          <p:cNvPr id="7" name="내용 개체 틀 6">
+            <a:extLst>
+              <a:ext uri="{FF2B5EF4-FFF2-40B4-BE49-F238E27FC236}">
+                <a16:creationId xmlns:a16="http://schemas.microsoft.com/office/drawing/2014/main" id="{3A773B5A-0D8F-1E0C-8699-966BCE5E4B77}"/>
+              </a:ext>
+            </a:extLst>
+          </p:cNvPr>
+          <p:cNvPicPr>
+            <a:picLocks noGrp="1" noChangeAspect="1"/>
+          </p:cNvPicPr>
+          <p:nvPr>
+            <p:ph idx="1"/>
+          </p:nvPr>
+        </p:nvPicPr>
+        <p:blipFill>
+          <a:blip r:embed="rId2"/>
+          <a:stretch>
+            <a:fillRect/>
+          </a:stretch>
+        </p:blipFill>
+        <p:spPr bwMode="auto">
+          <a:xfrm>
+            <a:off x="755576" y="1153254"/>
+            <a:ext cx="4085594" cy="4840288"/>
+          </a:xfrm>
+          <a:prstGeom prst="rect">
+            <a:avLst/>
+          </a:prstGeom>
+          <a:noFill/>
+          <a:ln>
+            <a:noFill/>
+          </a:ln>
+          <a:extLst>
+            <a:ext uri="{909E8E84-426E-40DD-AFC4-6F175D3DCCD1}">
+              <a14:hiddenFill xmlns:a14="http://schemas.microsoft.com/office/drawing/2010/main">
+                <a:solidFill>
+                  <a:srgbClr val="FFFFFF"/>
+                </a:solidFill>
+              </a14:hiddenFill>
+            </a:ext>
+            <a:ext uri="{91240B29-F687-4F45-9708-019B960494DF}">
+              <a14:hiddenLine xmlns:a14="http://schemas.microsoft.com/office/drawing/2010/main" w="9525">
+                <a:solidFill>
+                  <a:srgbClr val="000000"/>
+                </a:solidFill>
+                <a:miter lim="800000"/>
+                <a:headEnd/>
+                <a:tailEnd/>
+              </a14:hiddenLine>
+            </a:ext>
+          </a:extLst>
+        </p:spPr>
+      </p:pic>
+      <p:sp>
+        <p:nvSpPr>
+          <p:cNvPr id="4" name="날짜 개체 틀 3">
+            <a:extLst>
+              <a:ext uri="{FF2B5EF4-FFF2-40B4-BE49-F238E27FC236}">
+                <a16:creationId xmlns:a16="http://schemas.microsoft.com/office/drawing/2014/main" id="{5E23D1C2-E8D6-43D8-6261-1FCD846B52E7}"/>
+              </a:ext>
+            </a:extLst>
+          </p:cNvPr>
+          <p:cNvSpPr>
+            <a:spLocks noGrp="1"/>
+          </p:cNvSpPr>
+          <p:nvPr>
+            <p:ph type="dt" sz="half" idx="10"/>
+          </p:nvPr>
+        </p:nvSpPr>
+        <p:spPr/>
+        <p:txBody>
+          <a:bodyPr/>
+          <a:lstStyle/>
+          <a:p>
+            <a:pPr>
+              <a:defRPr/>
+            </a:pPr>
+            <a:r>
+              <a:rPr lang="en-US" altLang="ko-KR"/>
+              <a:t>2008</a:t>
+            </a:r>
+            <a:r>
+              <a:rPr lang="ko-KR" altLang="en-US"/>
+              <a:t>년</a:t>
+            </a:r>
+            <a:r>
+              <a:rPr lang="en-US" altLang="ko-KR"/>
+              <a:t>2</a:t>
+            </a:r>
+            <a:r>
+              <a:rPr lang="ko-KR" altLang="en-US"/>
+              <a:t>학기 </a:t>
+            </a:r>
+            <a:r>
+              <a:rPr lang="en-US" altLang="ko-KR"/>
+              <a:t>3D</a:t>
+            </a:r>
+            <a:r>
+              <a:rPr lang="ko-KR" altLang="en-US"/>
+              <a:t>게임프로그래밍</a:t>
+            </a:r>
+            <a:r>
+              <a:rPr lang="en-US" altLang="ko-KR"/>
+              <a:t>II </a:t>
+            </a:r>
+            <a:r>
+              <a:rPr lang="ko-KR" altLang="en-US"/>
+              <a:t>담당교수</a:t>
+            </a:r>
+            <a:r>
+              <a:rPr lang="en-US" altLang="ko-KR"/>
+              <a:t>:</a:t>
+            </a:r>
+            <a:r>
+              <a:rPr lang="ko-KR" altLang="en-US"/>
+              <a:t>김영식</a:t>
+            </a:r>
+          </a:p>
+        </p:txBody>
+      </p:sp>
+      <p:sp>
+        <p:nvSpPr>
+          <p:cNvPr id="5" name="슬라이드 번호 개체 틀 4">
+            <a:extLst>
+              <a:ext uri="{FF2B5EF4-FFF2-40B4-BE49-F238E27FC236}">
+                <a16:creationId xmlns:a16="http://schemas.microsoft.com/office/drawing/2014/main" id="{5FB88143-0B6F-BD83-7A66-BE15FF8E8895}"/>
+              </a:ext>
+            </a:extLst>
+          </p:cNvPr>
+          <p:cNvSpPr>
+            <a:spLocks noGrp="1"/>
+          </p:cNvSpPr>
+          <p:nvPr>
+            <p:ph type="sldNum" sz="quarter" idx="12"/>
+          </p:nvPr>
+        </p:nvSpPr>
+        <p:spPr/>
+        <p:txBody>
+          <a:bodyPr/>
+          <a:lstStyle/>
+          <a:p>
+            <a:pPr>
+              <a:defRPr/>
+            </a:pPr>
+            <a:fld id="{A268DA64-E15D-4814-A1DA-86D92D550423}" type="slidenum">
+              <a:rPr lang="ko-KR" altLang="en-US" smtClean="0"/>
+              <a:pPr>
+                <a:defRPr/>
+              </a:pPr>
+              <a:t>13</a:t>
+            </a:fld>
+            <a:endParaRPr lang="ko-KR" altLang="en-US"/>
+          </a:p>
+        </p:txBody>
+      </p:sp>
+      <p:pic>
+        <p:nvPicPr>
+          <p:cNvPr id="9" name="그림 8">
+            <a:extLst>
+              <a:ext uri="{FF2B5EF4-FFF2-40B4-BE49-F238E27FC236}">
+                <a16:creationId xmlns:a16="http://schemas.microsoft.com/office/drawing/2014/main" id="{9D77913F-65D8-A9F3-C730-86F9A8C2814E}"/>
+              </a:ext>
+            </a:extLst>
+          </p:cNvPr>
+          <p:cNvPicPr>
+            <a:picLocks noChangeAspect="1"/>
+          </p:cNvPicPr>
+          <p:nvPr/>
+        </p:nvPicPr>
+        <p:blipFill>
+          <a:blip r:embed="rId3"/>
+          <a:stretch>
+            <a:fillRect/>
+          </a:stretch>
+        </p:blipFill>
+        <p:spPr>
+          <a:xfrm>
+            <a:off x="4000500" y="1121201"/>
+            <a:ext cx="4392488" cy="2307799"/>
+          </a:xfrm>
+          <a:prstGeom prst="rect">
+            <a:avLst/>
+          </a:prstGeom>
+        </p:spPr>
+      </p:pic>
+    </p:spTree>
+    <p:extLst>
+      <p:ext uri="{BB962C8B-B14F-4D97-AF65-F5344CB8AC3E}">
+        <p14:creationId xmlns:p14="http://schemas.microsoft.com/office/powerpoint/2010/main" val="114149333"/>
+      </p:ext>
+    </p:extLst>
+  </p:cSld>
+  <p:clrMapOvr>
+    <a:masterClrMapping/>
+  </p:clrMapOvr>
+</p:sld>
+</file>
+
+<file path=ppt/slides/slide14.xml><?xml version="1.0" encoding="utf-8"?>
+<p:sld xmlns:a="http://schemas.openxmlformats.org/drawingml/2006/main" xmlns:r="http://schemas.openxmlformats.org/officeDocument/2006/relationships" xmlns:p="http://schemas.openxmlformats.org/presentationml/2006/main">
+  <p:cSld>
+    <p:spTree>
+      <p:nvGrpSpPr>
+        <p:cNvPr id="1" name=""/>
+        <p:cNvGrpSpPr/>
+        <p:nvPr/>
+      </p:nvGrpSpPr>
+      <p:grpSpPr>
+        <a:xfrm>
+          <a:off x="0" y="0"/>
+          <a:ext cx="0" cy="0"/>
+          <a:chOff x="0" y="0"/>
+          <a:chExt cx="0" cy="0"/>
+        </a:xfrm>
+      </p:grpSpPr>
+      <p:sp>
+        <p:nvSpPr>
+          <p:cNvPr id="2" name="제목 1">
+            <a:extLst>
+              <a:ext uri="{FF2B5EF4-FFF2-40B4-BE49-F238E27FC236}">
+                <a16:creationId xmlns:a16="http://schemas.microsoft.com/office/drawing/2014/main" id="{793584ED-41EE-A1DB-B594-252252D66001}"/>
+              </a:ext>
+            </a:extLst>
+          </p:cNvPr>
+          <p:cNvSpPr>
+            <a:spLocks noGrp="1"/>
+          </p:cNvSpPr>
+          <p:nvPr>
+            <p:ph type="title"/>
+          </p:nvPr>
+        </p:nvSpPr>
+        <p:spPr/>
+        <p:txBody>
+          <a:bodyPr/>
+          <a:lstStyle/>
+          <a:p>
+            <a:r>
+              <a:rPr lang="en-US" altLang="ko-KR" dirty="0"/>
+              <a:t>4. </a:t>
+            </a:r>
+            <a:r>
+              <a:rPr lang="ko-KR" altLang="en-US" dirty="0"/>
+              <a:t>균형 잡힌 영양소 </a:t>
+            </a:r>
+            <a:r>
+              <a:rPr lang="en-US" altLang="ko-KR" dirty="0"/>
+              <a:t>(</a:t>
+            </a:r>
+            <a:r>
+              <a:rPr lang="en-US" altLang="ko-KR" dirty="0" err="1"/>
+              <a:t>TUKorea</a:t>
+            </a:r>
+            <a:r>
+              <a:rPr lang="en-US" altLang="ko-KR" dirty="0"/>
+              <a:t>, </a:t>
+            </a:r>
+            <a:r>
+              <a:rPr lang="ko-KR" altLang="en-US" dirty="0"/>
+              <a:t>조합</a:t>
+            </a:r>
+            <a:r>
+              <a:rPr lang="en-US" altLang="ko-KR" dirty="0"/>
+              <a:t>)</a:t>
+            </a:r>
+            <a:endParaRPr lang="ko-KR" altLang="en-US" dirty="0"/>
+          </a:p>
+        </p:txBody>
+      </p:sp>
+      <p:pic>
+        <p:nvPicPr>
+          <p:cNvPr id="7" name="내용 개체 틀 6">
+            <a:extLst>
+              <a:ext uri="{FF2B5EF4-FFF2-40B4-BE49-F238E27FC236}">
+                <a16:creationId xmlns:a16="http://schemas.microsoft.com/office/drawing/2014/main" id="{0F13181C-CAD7-A713-4F49-C2EFAEF2984B}"/>
+              </a:ext>
+            </a:extLst>
+          </p:cNvPr>
+          <p:cNvPicPr>
+            <a:picLocks noGrp="1" noChangeAspect="1"/>
+          </p:cNvPicPr>
+          <p:nvPr>
+            <p:ph idx="1"/>
+          </p:nvPr>
+        </p:nvPicPr>
+        <p:blipFill>
+          <a:blip r:embed="rId2"/>
+          <a:stretch>
+            <a:fillRect/>
+          </a:stretch>
+        </p:blipFill>
+        <p:spPr bwMode="auto">
+          <a:xfrm>
+            <a:off x="435899" y="1762812"/>
+            <a:ext cx="8003232" cy="3332376"/>
+          </a:xfrm>
+          <a:prstGeom prst="rect">
+            <a:avLst/>
+          </a:prstGeom>
+          <a:noFill/>
+          <a:ln>
+            <a:noFill/>
+          </a:ln>
+          <a:extLst>
+            <a:ext uri="{909E8E84-426E-40DD-AFC4-6F175D3DCCD1}">
+              <a14:hiddenFill xmlns:a14="http://schemas.microsoft.com/office/drawing/2010/main">
+                <a:solidFill>
+                  <a:srgbClr val="FFFFFF"/>
+                </a:solidFill>
+              </a14:hiddenFill>
+            </a:ext>
+            <a:ext uri="{91240B29-F687-4F45-9708-019B960494DF}">
+              <a14:hiddenLine xmlns:a14="http://schemas.microsoft.com/office/drawing/2010/main" w="9525">
+                <a:solidFill>
+                  <a:srgbClr val="000000"/>
+                </a:solidFill>
+                <a:miter lim="800000"/>
+                <a:headEnd/>
+                <a:tailEnd/>
+              </a14:hiddenLine>
+            </a:ext>
+          </a:extLst>
+        </p:spPr>
+      </p:pic>
+      <p:sp>
+        <p:nvSpPr>
+          <p:cNvPr id="4" name="날짜 개체 틀 3">
+            <a:extLst>
+              <a:ext uri="{FF2B5EF4-FFF2-40B4-BE49-F238E27FC236}">
+                <a16:creationId xmlns:a16="http://schemas.microsoft.com/office/drawing/2014/main" id="{964DA668-C72C-607A-5006-7CA9C6F39E71}"/>
+              </a:ext>
+            </a:extLst>
+          </p:cNvPr>
+          <p:cNvSpPr>
+            <a:spLocks noGrp="1"/>
+          </p:cNvSpPr>
+          <p:nvPr>
+            <p:ph type="dt" sz="half" idx="10"/>
+          </p:nvPr>
+        </p:nvSpPr>
+        <p:spPr/>
+        <p:txBody>
+          <a:bodyPr/>
+          <a:lstStyle/>
+          <a:p>
+            <a:pPr>
+              <a:defRPr/>
+            </a:pPr>
+            <a:r>
+              <a:rPr lang="en-US" altLang="ko-KR"/>
+              <a:t>2008</a:t>
+            </a:r>
+            <a:r>
+              <a:rPr lang="ko-KR" altLang="en-US"/>
+              <a:t>년</a:t>
+            </a:r>
+            <a:r>
+              <a:rPr lang="en-US" altLang="ko-KR"/>
+              <a:t>2</a:t>
+            </a:r>
+            <a:r>
+              <a:rPr lang="ko-KR" altLang="en-US"/>
+              <a:t>학기 </a:t>
+            </a:r>
+            <a:r>
+              <a:rPr lang="en-US" altLang="ko-KR"/>
+              <a:t>3D</a:t>
+            </a:r>
+            <a:r>
+              <a:rPr lang="ko-KR" altLang="en-US"/>
+              <a:t>게임프로그래밍</a:t>
+            </a:r>
+            <a:r>
+              <a:rPr lang="en-US" altLang="ko-KR"/>
+              <a:t>II </a:t>
+            </a:r>
+            <a:r>
+              <a:rPr lang="ko-KR" altLang="en-US"/>
+              <a:t>담당교수</a:t>
+            </a:r>
+            <a:r>
+              <a:rPr lang="en-US" altLang="ko-KR"/>
+              <a:t>:</a:t>
+            </a:r>
+            <a:r>
+              <a:rPr lang="ko-KR" altLang="en-US"/>
+              <a:t>김영식</a:t>
+            </a:r>
+          </a:p>
+        </p:txBody>
+      </p:sp>
+      <p:sp>
+        <p:nvSpPr>
+          <p:cNvPr id="5" name="슬라이드 번호 개체 틀 4">
+            <a:extLst>
+              <a:ext uri="{FF2B5EF4-FFF2-40B4-BE49-F238E27FC236}">
+                <a16:creationId xmlns:a16="http://schemas.microsoft.com/office/drawing/2014/main" id="{53A5AE7E-0596-9A3D-1848-AAC9AE9A8383}"/>
+              </a:ext>
+            </a:extLst>
+          </p:cNvPr>
+          <p:cNvSpPr>
+            <a:spLocks noGrp="1"/>
+          </p:cNvSpPr>
+          <p:nvPr>
+            <p:ph type="sldNum" sz="quarter" idx="12"/>
+          </p:nvPr>
+        </p:nvSpPr>
+        <p:spPr/>
+        <p:txBody>
+          <a:bodyPr/>
+          <a:lstStyle/>
+          <a:p>
+            <a:pPr>
+              <a:defRPr/>
+            </a:pPr>
+            <a:fld id="{A268DA64-E15D-4814-A1DA-86D92D550423}" type="slidenum">
+              <a:rPr lang="ko-KR" altLang="en-US" smtClean="0"/>
+              <a:pPr>
+                <a:defRPr/>
+              </a:pPr>
+              <a:t>14</a:t>
+            </a:fld>
+            <a:endParaRPr lang="ko-KR" altLang="en-US"/>
+          </a:p>
+        </p:txBody>
+      </p:sp>
+    </p:spTree>
+    <p:extLst>
+      <p:ext uri="{BB962C8B-B14F-4D97-AF65-F5344CB8AC3E}">
+        <p14:creationId xmlns:p14="http://schemas.microsoft.com/office/powerpoint/2010/main" val="1570315092"/>
+      </p:ext>
+    </p:extLst>
+  </p:cSld>
+  <p:clrMapOvr>
+    <a:masterClrMapping/>
+  </p:clrMapOvr>
+</p:sld>
+</file>
+
+<file path=ppt/slides/slide15.xml><?xml version="1.0" encoding="utf-8"?>
 <p:sld xmlns:a="http://schemas.openxmlformats.org/drawingml/2006/main" xmlns:r="http://schemas.openxmlformats.org/officeDocument/2006/relationships" xmlns:p="http://schemas.openxmlformats.org/presentationml/2006/main">
   <p:cSld>
     <p:spTree>
@@ -7322,7 +8400,7 @@
               <a:pPr>
                 <a:defRPr/>
               </a:pPr>
-              <a:t>11</a:t>
+              <a:t>15</a:t>
             </a:fld>
             <a:endParaRPr lang="ko-KR" altLang="en-US"/>
           </a:p>
@@ -7529,6 +8607,273 @@
     <p:extLst>
       <p:ext uri="{BB962C8B-B14F-4D97-AF65-F5344CB8AC3E}">
         <p14:creationId xmlns:p14="http://schemas.microsoft.com/office/powerpoint/2010/main" val="2988214561"/>
+      </p:ext>
+    </p:extLst>
+  </p:cSld>
+  <p:clrMapOvr>
+    <a:masterClrMapping/>
+  </p:clrMapOvr>
+</p:sld>
+</file>
+
+<file path=ppt/slides/slide16.xml><?xml version="1.0" encoding="utf-8"?>
+<p:sld xmlns:a="http://schemas.openxmlformats.org/drawingml/2006/main" xmlns:r="http://schemas.openxmlformats.org/officeDocument/2006/relationships" xmlns:p="http://schemas.openxmlformats.org/presentationml/2006/main">
+  <p:cSld>
+    <p:spTree>
+      <p:nvGrpSpPr>
+        <p:cNvPr id="1" name=""/>
+        <p:cNvGrpSpPr/>
+        <p:nvPr/>
+      </p:nvGrpSpPr>
+      <p:grpSpPr>
+        <a:xfrm>
+          <a:off x="0" y="0"/>
+          <a:ext cx="0" cy="0"/>
+          <a:chOff x="0" y="0"/>
+          <a:chExt cx="0" cy="0"/>
+        </a:xfrm>
+      </p:grpSpPr>
+      <p:sp>
+        <p:nvSpPr>
+          <p:cNvPr id="2" name="제목 1">
+            <a:extLst>
+              <a:ext uri="{FF2B5EF4-FFF2-40B4-BE49-F238E27FC236}">
+                <a16:creationId xmlns:a16="http://schemas.microsoft.com/office/drawing/2014/main" id="{3BB25754-DC93-74BC-9533-8FD56BC224AA}"/>
+              </a:ext>
+            </a:extLst>
+          </p:cNvPr>
+          <p:cNvSpPr>
+            <a:spLocks noGrp="1"/>
+          </p:cNvSpPr>
+          <p:nvPr>
+            <p:ph type="title"/>
+          </p:nvPr>
+        </p:nvSpPr>
+        <p:spPr>
+          <a:xfrm>
+            <a:off x="457200" y="274638"/>
+            <a:ext cx="8229600" cy="413551"/>
+          </a:xfrm>
+        </p:spPr>
+        <p:txBody>
+          <a:bodyPr/>
+          <a:lstStyle/>
+          <a:p>
+            <a:r>
+              <a:rPr lang="en-US" altLang="ko-KR"/>
+              <a:t>5. </a:t>
+            </a:r>
+            <a:r>
+              <a:rPr lang="ko-KR" altLang="en-US"/>
+              <a:t>체육복 </a:t>
+            </a:r>
+            <a:r>
+              <a:rPr lang="en-US" altLang="ko-KR"/>
+              <a:t>(Programmers, </a:t>
+            </a:r>
+            <a:r>
+              <a:rPr lang="ko-KR" altLang="en-US"/>
+              <a:t>그리디</a:t>
+            </a:r>
+            <a:r>
+              <a:rPr lang="en-US" altLang="ko-KR"/>
+              <a:t>)</a:t>
+            </a:r>
+            <a:endParaRPr lang="ko-KR" altLang="en-US"/>
+          </a:p>
+        </p:txBody>
+      </p:sp>
+      <p:pic>
+        <p:nvPicPr>
+          <p:cNvPr id="7" name="내용 개체 틀 6">
+            <a:extLst>
+              <a:ext uri="{FF2B5EF4-FFF2-40B4-BE49-F238E27FC236}">
+                <a16:creationId xmlns:a16="http://schemas.microsoft.com/office/drawing/2014/main" id="{DB3D3385-14BC-79A6-48D7-E85CC95012E3}"/>
+              </a:ext>
+            </a:extLst>
+          </p:cNvPr>
+          <p:cNvPicPr>
+            <a:picLocks noGrp="1" noChangeAspect="1"/>
+          </p:cNvPicPr>
+          <p:nvPr>
+            <p:ph idx="1"/>
+          </p:nvPr>
+        </p:nvPicPr>
+        <p:blipFill>
+          <a:blip r:embed="rId2"/>
+          <a:stretch>
+            <a:fillRect/>
+          </a:stretch>
+        </p:blipFill>
+        <p:spPr bwMode="auto">
+          <a:xfrm>
+            <a:off x="276774" y="1268760"/>
+            <a:ext cx="4329246" cy="4724400"/>
+          </a:xfrm>
+          <a:prstGeom prst="rect">
+            <a:avLst/>
+          </a:prstGeom>
+          <a:noFill/>
+          <a:ln>
+            <a:noFill/>
+          </a:ln>
+          <a:extLst>
+            <a:ext uri="{909E8E84-426E-40DD-AFC4-6F175D3DCCD1}">
+              <a14:hiddenFill xmlns:a14="http://schemas.microsoft.com/office/drawing/2010/main">
+                <a:solidFill>
+                  <a:srgbClr val="FFFFFF"/>
+                </a:solidFill>
+              </a14:hiddenFill>
+            </a:ext>
+            <a:ext uri="{91240B29-F687-4F45-9708-019B960494DF}">
+              <a14:hiddenLine xmlns:a14="http://schemas.microsoft.com/office/drawing/2010/main" w="9525">
+                <a:solidFill>
+                  <a:srgbClr val="000000"/>
+                </a:solidFill>
+                <a:miter lim="800000"/>
+                <a:headEnd/>
+                <a:tailEnd/>
+              </a14:hiddenLine>
+            </a:ext>
+          </a:extLst>
+        </p:spPr>
+      </p:pic>
+      <p:sp>
+        <p:nvSpPr>
+          <p:cNvPr id="4" name="날짜 개체 틀 3">
+            <a:extLst>
+              <a:ext uri="{FF2B5EF4-FFF2-40B4-BE49-F238E27FC236}">
+                <a16:creationId xmlns:a16="http://schemas.microsoft.com/office/drawing/2014/main" id="{56EC0646-2182-F192-6162-A63D5A7BDA30}"/>
+              </a:ext>
+            </a:extLst>
+          </p:cNvPr>
+          <p:cNvSpPr>
+            <a:spLocks noGrp="1"/>
+          </p:cNvSpPr>
+          <p:nvPr>
+            <p:ph type="dt" sz="half" idx="10"/>
+          </p:nvPr>
+        </p:nvSpPr>
+        <p:spPr/>
+        <p:txBody>
+          <a:bodyPr/>
+          <a:lstStyle/>
+          <a:p>
+            <a:pPr>
+              <a:defRPr/>
+            </a:pPr>
+            <a:r>
+              <a:rPr lang="en-US" altLang="ko-KR"/>
+              <a:t>2008</a:t>
+            </a:r>
+            <a:r>
+              <a:rPr lang="ko-KR" altLang="en-US"/>
+              <a:t>년</a:t>
+            </a:r>
+            <a:r>
+              <a:rPr lang="en-US" altLang="ko-KR"/>
+              <a:t>2</a:t>
+            </a:r>
+            <a:r>
+              <a:rPr lang="ko-KR" altLang="en-US"/>
+              <a:t>학기 </a:t>
+            </a:r>
+            <a:r>
+              <a:rPr lang="en-US" altLang="ko-KR"/>
+              <a:t>3D</a:t>
+            </a:r>
+            <a:r>
+              <a:rPr lang="ko-KR" altLang="en-US"/>
+              <a:t>게임프로그래밍</a:t>
+            </a:r>
+            <a:r>
+              <a:rPr lang="en-US" altLang="ko-KR"/>
+              <a:t>II </a:t>
+            </a:r>
+            <a:r>
+              <a:rPr lang="ko-KR" altLang="en-US"/>
+              <a:t>담당교수</a:t>
+            </a:r>
+            <a:r>
+              <a:rPr lang="en-US" altLang="ko-KR"/>
+              <a:t>:</a:t>
+            </a:r>
+            <a:r>
+              <a:rPr lang="ko-KR" altLang="en-US"/>
+              <a:t>김영식</a:t>
+            </a:r>
+          </a:p>
+        </p:txBody>
+      </p:sp>
+      <p:sp>
+        <p:nvSpPr>
+          <p:cNvPr id="5" name="슬라이드 번호 개체 틀 4">
+            <a:extLst>
+              <a:ext uri="{FF2B5EF4-FFF2-40B4-BE49-F238E27FC236}">
+                <a16:creationId xmlns:a16="http://schemas.microsoft.com/office/drawing/2014/main" id="{09B1468D-E605-30F4-F433-69AE85E4A052}"/>
+              </a:ext>
+            </a:extLst>
+          </p:cNvPr>
+          <p:cNvSpPr>
+            <a:spLocks noGrp="1"/>
+          </p:cNvSpPr>
+          <p:nvPr>
+            <p:ph type="sldNum" sz="quarter" idx="12"/>
+          </p:nvPr>
+        </p:nvSpPr>
+        <p:spPr/>
+        <p:txBody>
+          <a:bodyPr/>
+          <a:lstStyle/>
+          <a:p>
+            <a:pPr>
+              <a:defRPr/>
+            </a:pPr>
+            <a:fld id="{A268DA64-E15D-4814-A1DA-86D92D550423}" type="slidenum">
+              <a:rPr lang="ko-KR" altLang="en-US" smtClean="0"/>
+              <a:pPr>
+                <a:defRPr/>
+              </a:pPr>
+              <a:t>16</a:t>
+            </a:fld>
+            <a:endParaRPr lang="ko-KR" altLang="en-US"/>
+          </a:p>
+        </p:txBody>
+      </p:sp>
+      <p:pic>
+        <p:nvPicPr>
+          <p:cNvPr id="9" name="그림 8">
+            <a:extLst>
+              <a:ext uri="{FF2B5EF4-FFF2-40B4-BE49-F238E27FC236}">
+                <a16:creationId xmlns:a16="http://schemas.microsoft.com/office/drawing/2014/main" id="{86F402D9-8B93-FDC8-DB01-F56F42390643}"/>
+              </a:ext>
+            </a:extLst>
+          </p:cNvPr>
+          <p:cNvPicPr>
+            <a:picLocks noChangeAspect="1"/>
+          </p:cNvPicPr>
+          <p:nvPr/>
+        </p:nvPicPr>
+        <p:blipFill>
+          <a:blip r:embed="rId3"/>
+          <a:stretch>
+            <a:fillRect/>
+          </a:stretch>
+        </p:blipFill>
+        <p:spPr>
+          <a:xfrm>
+            <a:off x="5436096" y="764704"/>
+            <a:ext cx="2488636" cy="5877272"/>
+          </a:xfrm>
+          <a:prstGeom prst="rect">
+            <a:avLst/>
+          </a:prstGeom>
+        </p:spPr>
+      </p:pic>
+    </p:spTree>
+    <p:extLst>
+      <p:ext uri="{BB962C8B-B14F-4D97-AF65-F5344CB8AC3E}">
+        <p14:creationId xmlns:p14="http://schemas.microsoft.com/office/powerpoint/2010/main" val="3841762757"/>
       </p:ext>
     </p:extLst>
   </p:cSld>
